--- a/modules/M4-doing/M4-doing.pptx
+++ b/modules/M4-doing/M4-doing.pptx
@@ -15619,7 +15619,7 @@
           <a:lstStyle/>
           <a:p>
             <a:r>
-              <a:t>Lab 4: ~50 Minutes · Everyone</a:t>
+              <a:t>Lab 4: ~45 Minutes · Everyone</a:t>
             </a:r>
           </a:p>
         </p:txBody>
